--- a/docs/SamajSevak_Hack2Ignite_AI-04.pptx
+++ b/docs/SamajSevak_Hack2Ignite_AI-04.pptx
@@ -8537,7 +8537,7 @@
                 <a:ea typeface="Calibri" pitchFamily="34" charset="-122"/>
                 <a:cs typeface="Calibri" pitchFamily="34" charset="-120"/>
               </a:rPr>
-              <a:t>github.com/&lt;your-username&gt;/samajsevak</a:t>
+              <a:t>github.com/Saikarpe/SamajSevak</a:t>
             </a:r>
             <a:endParaRPr lang="en-US" sz="1600" dirty="0"/>
           </a:p>
